--- a/Development_D1/Workshop/D1-W04_Apply_Workshop_L07-L08_The_Weekend_Interview.pptx
+++ b/Development_D1/Workshop/D1-W04_Apply_Workshop_L07-L08_The_Weekend_Interview.pptx
@@ -19658,7 +19658,7 @@
                 <a:latin typeface="Calibri" pitchFamily="34" charset="0"/>
                 <a:cs typeface="Amiri" pitchFamily="2" charset="-78"/>
               </a:rPr>
-              <a:t>STEP 9 · WRITE YOUR TEXT · ABOUT 70–90 WORDS</a:t>
+              <a:t>STEP 9 · WRITE YOUR TEXT · ABOUT 60–80 WORDS</a:t>
             </a:r>
             <a:endParaRPr lang="en-US" sz="1000" dirty="0"/>
           </a:p>
@@ -19910,7 +19910,7 @@
                 <a:latin typeface="Calibri" pitchFamily="34" charset="0"/>
                 <a:cs typeface="Amiri" pitchFamily="2" charset="-78"/>
               </a:rPr>
-              <a:t>Write up your interview (about 70–90 words): five questions with different question words, each with a full answer about the weekend — using the correct form for a boy or a girl. Then add a short summary in the third person (‏</a:t>
+              <a:t>Write up your interview (about 60–80 words): five questions with different question words, each with a full answer about the weekend — using the correct form for a boy or a girl. Then add a short summary in the third person (‏</a:t>
             </a:r>
             <a:pPr algn="l" indent="0" marL="0">
               <a:buNone/>
